--- a/Évaluer les risques professionnels - Ayming.pptx
+++ b/Évaluer les risques professionnels - Ayming.pptx
@@ -3223,8 +3223,8 @@
         </p:nvSpPr>
         <p:spPr>
           <a:xfrm>
-            <a:off x="2705032" y="2114497"/>
-            <a:ext cx="3238418" cy="3169662"/>
+            <a:off x="2317510" y="1989322"/>
+            <a:ext cx="3608524" cy="3531909"/>
           </a:xfrm>
           <a:prstGeom prst="rect">
             <a:avLst/>
@@ -3271,8 +3271,8 @@
         </p:nvSpPr>
         <p:spPr>
           <a:xfrm>
-            <a:off x="6248243" y="2114497"/>
-            <a:ext cx="3238418" cy="3169662"/>
+            <a:off x="6265660" y="1989322"/>
+            <a:ext cx="3608524" cy="3531909"/>
           </a:xfrm>
           <a:prstGeom prst="rect">
             <a:avLst/>
@@ -3361,8 +3361,8 @@
         </p:nvSpPr>
         <p:spPr>
           <a:xfrm>
-            <a:off x="857228" y="4775626"/>
-            <a:ext cx="1758509" cy="390515"/>
+            <a:off x="258529" y="4954581"/>
+            <a:ext cx="1959481" cy="435145"/>
           </a:xfrm>
           <a:prstGeom prst="rect">
             <a:avLst/>
